--- a/presentation/Circles_SGSITS_Hackathon_2026.pptx
+++ b/presentation/Circles_SGSITS_Hackathon_2026.pptx
@@ -8184,7 +8184,7 @@
               </a:defRPr>
             </a:pPr>
             <a:r>
-              <a:t>Madhav Maheshwari</a:t>
+              <a:t>Madhav Mandhanya</a:t>
             </a:r>
           </a:p>
         </p:txBody>
